--- a/FYP_Proposal/Sift_Proposal.pptx
+++ b/FYP_Proposal/Sift_Proposal.pptx
@@ -5,16 +5,15 @@
     <p:sldMasterId id="2147483648" r:id="rId1"/>
   </p:sldMasterIdLst>
   <p:notesMasterIdLst>
-    <p:notesMasterId r:id="rId9"/>
+    <p:notesMasterId r:id="rId8"/>
   </p:notesMasterIdLst>
   <p:sldIdLst>
     <p:sldId id="256" r:id="rId2"/>
     <p:sldId id="257" r:id="rId3"/>
     <p:sldId id="258" r:id="rId4"/>
     <p:sldId id="259" r:id="rId5"/>
-    <p:sldId id="260" r:id="rId6"/>
-    <p:sldId id="261" r:id="rId7"/>
-    <p:sldId id="262" r:id="rId8"/>
+    <p:sldId id="261" r:id="rId6"/>
+    <p:sldId id="262" r:id="rId7"/>
   </p:sldIdLst>
   <p:sldSz cx="12192000" cy="6858000"/>
   <p:notesSz cx="6858000" cy="9144000"/>
@@ -3691,7 +3690,7 @@
         <p:spPr>
           <a:xfrm>
             <a:off x="822960" y="5852160"/>
-            <a:ext cx="10058400" cy="365760"/>
+            <a:ext cx="10058400" cy="200055"/>
           </a:xfrm>
           <a:prstGeom prst="rect">
             <a:avLst/>
@@ -3706,13 +3705,49 @@
           <a:p>
             <a:pPr algn="l"/>
             <a:r>
-              <a:rPr sz="1300" b="1">
+              <a:rPr sz="1300" b="1" dirty="0">
                 <a:solidFill>
                   <a:srgbClr val="101A2E"/>
                 </a:solidFill>
                 <a:latin typeface="Calibri"/>
               </a:rPr>
-              <a:t>CM3020 Artificial Intelligence  ·  Template 4.2 — Financial Advisor Bot</a:t>
+              <a:t>CM30</a:t>
+            </a:r>
+            <a:r>
+              <a:rPr lang="en-US" sz="1300" b="1" dirty="0">
+                <a:solidFill>
+                  <a:srgbClr val="101A2E"/>
+                </a:solidFill>
+                <a:latin typeface="Calibri"/>
+              </a:rPr>
+              <a:t>7</a:t>
+            </a:r>
+            <a:r>
+              <a:rPr sz="1300" b="1" dirty="0">
+                <a:solidFill>
+                  <a:srgbClr val="101A2E"/>
+                </a:solidFill>
+                <a:latin typeface="Calibri"/>
+              </a:rPr>
+              <a:t>0 </a:t>
+            </a:r>
+            <a:r>
+              <a:rPr lang="en-US" sz="1300" b="1" dirty="0">
+                <a:solidFill>
+                  <a:srgbClr val="101A2E"/>
+                </a:solidFill>
+                <a:latin typeface="Calibri"/>
+              </a:rPr>
+              <a:t>Final Year Project</a:t>
+            </a:r>
+            <a:r>
+              <a:rPr sz="1300" b="1" dirty="0">
+                <a:solidFill>
+                  <a:srgbClr val="101A2E"/>
+                </a:solidFill>
+                <a:latin typeface="Calibri"/>
+              </a:rPr>
+              <a:t>  ·  Template 4.2 — Financial Advisor Bot</a:t>
             </a:r>
           </a:p>
         </p:txBody>
@@ -4305,7 +4340,7 @@
         <p:spPr>
           <a:xfrm>
             <a:off x="640080" y="6537960"/>
-            <a:ext cx="7315200" cy="274320"/>
+            <a:ext cx="7315200" cy="153888"/>
           </a:xfrm>
           <a:prstGeom prst="rect">
             <a:avLst/>
@@ -4320,13 +4355,49 @@
           <a:p>
             <a:pPr algn="l"/>
             <a:r>
-              <a:rPr sz="1000" b="0">
+              <a:rPr sz="1000" b="0" dirty="0">
                 <a:solidFill>
                   <a:srgbClr val="556072"/>
                 </a:solidFill>
                 <a:latin typeface="Calibri"/>
               </a:rPr>
-              <a:t>Sift  ·  CM3020 AI  ·  Template 4.2 — Financial Advisor Bot</a:t>
+              <a:t>Sift  ·  CM30</a:t>
+            </a:r>
+            <a:r>
+              <a:rPr lang="en-US" sz="1000" b="0" dirty="0">
+                <a:solidFill>
+                  <a:srgbClr val="556072"/>
+                </a:solidFill>
+                <a:latin typeface="Calibri"/>
+              </a:rPr>
+              <a:t>70</a:t>
+            </a:r>
+            <a:r>
+              <a:rPr sz="1000" b="0" dirty="0">
+                <a:solidFill>
+                  <a:srgbClr val="556072"/>
+                </a:solidFill>
+                <a:latin typeface="Calibri"/>
+              </a:rPr>
+              <a:t> </a:t>
+            </a:r>
+            <a:r>
+              <a:rPr lang="en-US" sz="1000" b="0" dirty="0">
+                <a:solidFill>
+                  <a:srgbClr val="556072"/>
+                </a:solidFill>
+                <a:latin typeface="Calibri"/>
+              </a:rPr>
+              <a:t>FYP</a:t>
+            </a:r>
+            <a:r>
+              <a:rPr sz="1000" b="0" dirty="0">
+                <a:solidFill>
+                  <a:srgbClr val="556072"/>
+                </a:solidFill>
+                <a:latin typeface="Calibri"/>
+              </a:rPr>
+              <a:t>  ·  Template 4.2 — Financial Advisor Bot</a:t>
             </a:r>
           </a:p>
         </p:txBody>
@@ -4975,7 +5046,7 @@
         <p:spPr>
           <a:xfrm>
             <a:off x="640080" y="6537960"/>
-            <a:ext cx="7315200" cy="274320"/>
+            <a:ext cx="7315200" cy="153888"/>
           </a:xfrm>
           <a:prstGeom prst="rect">
             <a:avLst/>
@@ -4990,13 +5061,31 @@
           <a:p>
             <a:pPr algn="l"/>
             <a:r>
-              <a:rPr sz="1000" b="0">
+              <a:rPr sz="1000" b="0" dirty="0">
                 <a:solidFill>
                   <a:srgbClr val="556072"/>
                 </a:solidFill>
                 <a:latin typeface="Calibri"/>
               </a:rPr>
-              <a:t>Sift  ·  CM3020 AI  ·  Template 4.2 — Financial Advisor Bot</a:t>
+              <a:t>Sift  ·  CM30</a:t>
+            </a:r>
+            <a:r>
+              <a:rPr lang="en-US" sz="1000" b="0" dirty="0">
+                <a:solidFill>
+                  <a:srgbClr val="556072"/>
+                </a:solidFill>
+                <a:latin typeface="Calibri"/>
+              </a:rPr>
+              <a:t>70 FYP</a:t>
+            </a:r>
+            <a:r>
+              <a:rPr sz="1000" b="0" dirty="0">
+                <a:solidFill>
+                  <a:srgbClr val="556072"/>
+                </a:solidFill>
+                <a:latin typeface="Calibri"/>
+              </a:rPr>
+              <a:t>  ·  Template 4.2 — Financial Advisor Bot</a:t>
             </a:r>
           </a:p>
         </p:txBody>
@@ -5871,7 +5960,7 @@
         <p:spPr>
           <a:xfrm>
             <a:off x="640080" y="6537960"/>
-            <a:ext cx="7315200" cy="274320"/>
+            <a:ext cx="7315200" cy="153888"/>
           </a:xfrm>
           <a:prstGeom prst="rect">
             <a:avLst/>
@@ -5884,15 +5973,31 @@
           </a:bodyPr>
           <a:lstStyle/>
           <a:p>
-            <a:pPr algn="l"/>
-            <a:r>
-              <a:rPr sz="1000" b="0">
+            <a:r>
+              <a:rPr sz="1000" b="0" dirty="0">
                 <a:solidFill>
                   <a:srgbClr val="556072"/>
                 </a:solidFill>
                 <a:latin typeface="Calibri"/>
               </a:rPr>
-              <a:t>Sift  ·  CM3020 AI  ·  Template 4.2 — Financial Advisor Bot</a:t>
+              <a:t>Sift  · </a:t>
+            </a:r>
+            <a:r>
+              <a:rPr lang="en-US" sz="1000" dirty="0">
+                <a:solidFill>
+                  <a:srgbClr val="556072"/>
+                </a:solidFill>
+              </a:rPr>
+              <a:t>CM3070 FYP</a:t>
+            </a:r>
+            <a:r>
+              <a:rPr sz="1000" b="0" dirty="0">
+                <a:solidFill>
+                  <a:srgbClr val="556072"/>
+                </a:solidFill>
+                <a:latin typeface="Calibri"/>
+              </a:rPr>
+              <a:t>  ·  Template 4.2 — Financial Advisor Bot</a:t>
             </a:r>
           </a:p>
         </p:txBody>
@@ -6032,7 +6137,7 @@
                 </a:solidFill>
                 <a:latin typeface="Calibri"/>
               </a:rPr>
-              <a:t>SYNTHESIS</a:t>
+              <a:t>APPROACH</a:t>
             </a:r>
           </a:p>
         </p:txBody>
@@ -6067,7 +6172,7 @@
                 </a:solidFill>
                 <a:latin typeface="Calibri"/>
               </a:rPr>
-              <a:t>What the related work shows — and what's still open.</a:t>
+              <a:t>What gets built, and how.</a:t>
             </a:r>
           </a:p>
         </p:txBody>
@@ -6080,8 +6185,8 @@
         </p:nvSpPr>
         <p:spPr>
           <a:xfrm>
-            <a:off x="640080" y="2103120"/>
-            <a:ext cx="1828800" cy="777240"/>
+            <a:off x="640080" y="1965960"/>
+            <a:ext cx="1828800" cy="274320"/>
           </a:xfrm>
           <a:prstGeom prst="rect">
             <a:avLst/>
@@ -6089,20 +6194,20 @@
           <a:noFill/>
         </p:spPr>
         <p:txBody>
-          <a:bodyPr wrap="square" lIns="0" tIns="0" rIns="0" bIns="0" anchor="ctr">
+          <a:bodyPr wrap="square" lIns="0" tIns="0" rIns="0" bIns="0" anchor="t">
             <a:spAutoFit/>
           </a:bodyPr>
           <a:lstStyle/>
           <a:p>
             <a:pPr algn="l"/>
             <a:r>
-              <a:rPr sz="1200" b="1">
-                <a:solidFill>
-                  <a:srgbClr val="556072"/>
-                </a:solidFill>
-                <a:latin typeface="Calibri"/>
-              </a:rPr>
-              <a:t>ESTABLISHED</a:t>
+              <a:rPr sz="1100" b="1">
+                <a:solidFill>
+                  <a:srgbClr val="008E86"/>
+                </a:solidFill>
+                <a:latin typeface="Calibri"/>
+              </a:rPr>
+              <a:t>COMPONENTS</a:t>
             </a:r>
           </a:p>
         </p:txBody>
@@ -6115,8 +6220,8 @@
         </p:nvSpPr>
         <p:spPr>
           <a:xfrm>
-            <a:off x="2560320" y="2103120"/>
-            <a:ext cx="9006840" cy="777240"/>
+            <a:off x="640080" y="2331720"/>
+            <a:ext cx="2697480" cy="411480"/>
           </a:xfrm>
           <a:prstGeom prst="rect">
             <a:avLst/>
@@ -6124,33 +6229,296 @@
           <a:noFill/>
         </p:spPr>
         <p:txBody>
-          <a:bodyPr wrap="square" lIns="0" tIns="0" rIns="0" bIns="0" anchor="ctr">
+          <a:bodyPr wrap="square" lIns="0" tIns="0" rIns="0" bIns="0" anchor="t">
             <a:spAutoFit/>
           </a:bodyPr>
           <a:lstStyle/>
           <a:p>
             <a:pPr algn="l"/>
             <a:r>
-              <a:rPr sz="1400" b="0">
+              <a:rPr sz="1300" b="1">
+                <a:solidFill>
+                  <a:srgbClr val="101A2E"/>
+                </a:solidFill>
+                <a:latin typeface="Calibri"/>
+              </a:rPr>
+              <a:t>Pre-earnings briefing</a:t>
+            </a:r>
+          </a:p>
+        </p:txBody>
+      </p:sp>
+      <p:sp>
+        <p:nvSpPr>
+          <p:cNvPr id="7" name="TextBox 6"/>
+          <p:cNvSpPr txBox="1"/>
+          <p:nvPr/>
+        </p:nvSpPr>
+        <p:spPr>
+          <a:xfrm>
+            <a:off x="640080" y="2743200"/>
+            <a:ext cx="2697480" cy="1463040"/>
+          </a:xfrm>
+          <a:prstGeom prst="rect">
+            <a:avLst/>
+          </a:prstGeom>
+          <a:noFill/>
+        </p:spPr>
+        <p:txBody>
+          <a:bodyPr wrap="square" lIns="0" tIns="0" rIns="0" bIns="0" anchor="t">
+            <a:spAutoFit/>
+          </a:bodyPr>
+          <a:lstStyle/>
+          <a:p>
+            <a:pPr algn="l"/>
+            <a:r>
+              <a:rPr sz="1100" b="0">
                 <a:solidFill>
                   <a:srgbClr val="556072"/>
                 </a:solidFill>
                 <a:latin typeface="Calibri"/>
               </a:rPr>
-              <a:t>Transformer-based NLP works well on financial text.</a:t>
-            </a:r>
-          </a:p>
-        </p:txBody>
-      </p:sp>
-      <p:sp>
-        <p:nvSpPr>
-          <p:cNvPr id="7" name="Rectangle 6"/>
+              <a:t>LLM writes a plain-English summary of what to expect from the upcoming release.</a:t>
+            </a:r>
+          </a:p>
+        </p:txBody>
+      </p:sp>
+      <p:sp>
+        <p:nvSpPr>
+          <p:cNvPr id="8" name="TextBox 7"/>
+          <p:cNvSpPr txBox="1"/>
+          <p:nvPr/>
+        </p:nvSpPr>
+        <p:spPr>
+          <a:xfrm>
+            <a:off x="3456432" y="2331720"/>
+            <a:ext cx="2697480" cy="411480"/>
+          </a:xfrm>
+          <a:prstGeom prst="rect">
+            <a:avLst/>
+          </a:prstGeom>
+          <a:noFill/>
+        </p:spPr>
+        <p:txBody>
+          <a:bodyPr wrap="square" lIns="0" tIns="0" rIns="0" bIns="0" anchor="t">
+            <a:spAutoFit/>
+          </a:bodyPr>
+          <a:lstStyle/>
+          <a:p>
+            <a:pPr algn="l"/>
+            <a:r>
+              <a:rPr sz="1300" b="1">
+                <a:solidFill>
+                  <a:srgbClr val="101A2E"/>
+                </a:solidFill>
+                <a:latin typeface="Calibri"/>
+              </a:rPr>
+              <a:t>Filing explainer</a:t>
+            </a:r>
+          </a:p>
+        </p:txBody>
+      </p:sp>
+      <p:sp>
+        <p:nvSpPr>
+          <p:cNvPr id="9" name="TextBox 8"/>
+          <p:cNvSpPr txBox="1"/>
+          <p:nvPr/>
+        </p:nvSpPr>
+        <p:spPr>
+          <a:xfrm>
+            <a:off x="3456432" y="2743200"/>
+            <a:ext cx="2697480" cy="1463040"/>
+          </a:xfrm>
+          <a:prstGeom prst="rect">
+            <a:avLst/>
+          </a:prstGeom>
+          <a:noFill/>
+        </p:spPr>
+        <p:txBody>
+          <a:bodyPr wrap="square" lIns="0" tIns="0" rIns="0" bIns="0" anchor="t">
+            <a:spAutoFit/>
+          </a:bodyPr>
+          <a:lstStyle/>
+          <a:p>
+            <a:pPr algn="l"/>
+            <a:r>
+              <a:rPr sz="1100" b="0">
+                <a:solidFill>
+                  <a:srgbClr val="556072"/>
+                </a:solidFill>
+                <a:latin typeface="Calibri"/>
+              </a:rPr>
+              <a:t>When an 8-K hits, the LLM produces a plain-English explanation of what was reported.</a:t>
+            </a:r>
+          </a:p>
+        </p:txBody>
+      </p:sp>
+      <p:sp>
+        <p:nvSpPr>
+          <p:cNvPr id="10" name="TextBox 9"/>
+          <p:cNvSpPr txBox="1"/>
+          <p:nvPr/>
+        </p:nvSpPr>
+        <p:spPr>
+          <a:xfrm>
+            <a:off x="6272784" y="2331720"/>
+            <a:ext cx="2697480" cy="411480"/>
+          </a:xfrm>
+          <a:prstGeom prst="rect">
+            <a:avLst/>
+          </a:prstGeom>
+          <a:noFill/>
+        </p:spPr>
+        <p:txBody>
+          <a:bodyPr wrap="square" lIns="0" tIns="0" rIns="0" bIns="0" anchor="t">
+            <a:spAutoFit/>
+          </a:bodyPr>
+          <a:lstStyle/>
+          <a:p>
+            <a:pPr algn="l"/>
+            <a:r>
+              <a:rPr sz="1300" b="1">
+                <a:solidFill>
+                  <a:srgbClr val="101A2E"/>
+                </a:solidFill>
+                <a:latin typeface="Calibri"/>
+              </a:rPr>
+              <a:t>Transcript breakdown</a:t>
+            </a:r>
+          </a:p>
+        </p:txBody>
+      </p:sp>
+      <p:sp>
+        <p:nvSpPr>
+          <p:cNvPr id="11" name="TextBox 10"/>
+          <p:cNvSpPr txBox="1"/>
+          <p:nvPr/>
+        </p:nvSpPr>
+        <p:spPr>
+          <a:xfrm>
+            <a:off x="6272784" y="2743200"/>
+            <a:ext cx="2697480" cy="1463040"/>
+          </a:xfrm>
+          <a:prstGeom prst="rect">
+            <a:avLst/>
+          </a:prstGeom>
+          <a:noFill/>
+        </p:spPr>
+        <p:txBody>
+          <a:bodyPr wrap="square" lIns="0" tIns="0" rIns="0" bIns="0" anchor="t">
+            <a:spAutoFit/>
+          </a:bodyPr>
+          <a:lstStyle/>
+          <a:p>
+            <a:pPr algn="l"/>
+            <a:r>
+              <a:rPr sz="1100" b="0" dirty="0">
+                <a:solidFill>
+                  <a:srgbClr val="556072"/>
+                </a:solidFill>
+                <a:latin typeface="Calibri"/>
+              </a:rPr>
+              <a:t>LLM </a:t>
+            </a:r>
+            <a:r>
+              <a:rPr sz="1100" b="0" dirty="0" err="1">
+                <a:solidFill>
+                  <a:srgbClr val="556072"/>
+                </a:solidFill>
+                <a:latin typeface="Calibri"/>
+              </a:rPr>
+              <a:t>summarises</a:t>
+            </a:r>
+            <a:r>
+              <a:rPr sz="1100" b="0" dirty="0">
+                <a:solidFill>
+                  <a:srgbClr val="556072"/>
+                </a:solidFill>
+                <a:latin typeface="Calibri"/>
+              </a:rPr>
+              <a:t> the earnings call — key points, tone, and any change in outlook.</a:t>
+            </a:r>
+          </a:p>
+        </p:txBody>
+      </p:sp>
+      <p:sp>
+        <p:nvSpPr>
+          <p:cNvPr id="12" name="TextBox 11"/>
+          <p:cNvSpPr txBox="1"/>
+          <p:nvPr/>
+        </p:nvSpPr>
+        <p:spPr>
+          <a:xfrm>
+            <a:off x="9089136" y="2331720"/>
+            <a:ext cx="2697480" cy="411480"/>
+          </a:xfrm>
+          <a:prstGeom prst="rect">
+            <a:avLst/>
+          </a:prstGeom>
+          <a:noFill/>
+        </p:spPr>
+        <p:txBody>
+          <a:bodyPr wrap="square" lIns="0" tIns="0" rIns="0" bIns="0" anchor="t">
+            <a:spAutoFit/>
+          </a:bodyPr>
+          <a:lstStyle/>
+          <a:p>
+            <a:pPr algn="l"/>
+            <a:r>
+              <a:rPr sz="1300" b="1">
+                <a:solidFill>
+                  <a:srgbClr val="101A2E"/>
+                </a:solidFill>
+                <a:latin typeface="Calibri"/>
+              </a:rPr>
+              <a:t>Ask Sift</a:t>
+            </a:r>
+          </a:p>
+        </p:txBody>
+      </p:sp>
+      <p:sp>
+        <p:nvSpPr>
+          <p:cNvPr id="13" name="TextBox 12"/>
+          <p:cNvSpPr txBox="1"/>
+          <p:nvPr/>
+        </p:nvSpPr>
+        <p:spPr>
+          <a:xfrm>
+            <a:off x="9089136" y="2743200"/>
+            <a:ext cx="2697480" cy="1463040"/>
+          </a:xfrm>
+          <a:prstGeom prst="rect">
+            <a:avLst/>
+          </a:prstGeom>
+          <a:noFill/>
+        </p:spPr>
+        <p:txBody>
+          <a:bodyPr wrap="square" lIns="0" tIns="0" rIns="0" bIns="0" anchor="t">
+            <a:spAutoFit/>
+          </a:bodyPr>
+          <a:lstStyle/>
+          <a:p>
+            <a:pPr algn="l"/>
+            <a:r>
+              <a:rPr sz="1100" b="0">
+                <a:solidFill>
+                  <a:srgbClr val="556072"/>
+                </a:solidFill>
+                <a:latin typeface="Calibri"/>
+              </a:rPr>
+              <a:t>User can ask follow-up questions about any term, figure, or section they don't understand.</a:t>
+            </a:r>
+          </a:p>
+        </p:txBody>
+      </p:sp>
+      <p:sp>
+        <p:nvSpPr>
+          <p:cNvPr id="14" name="Rectangle 13"/>
           <p:cNvSpPr/>
           <p:nvPr/>
         </p:nvSpPr>
         <p:spPr>
           <a:xfrm>
-            <a:off x="640080" y="2945765"/>
+            <a:off x="640080" y="4389120"/>
             <a:ext cx="10927080" cy="6350"/>
           </a:xfrm>
           <a:prstGeom prst="rect">
@@ -6189,14 +6557,14 @@
       </p:sp>
       <p:sp>
         <p:nvSpPr>
-          <p:cNvPr id="8" name="TextBox 7"/>
+          <p:cNvPr id="15" name="TextBox 14"/>
           <p:cNvSpPr txBox="1"/>
           <p:nvPr/>
         </p:nvSpPr>
         <p:spPr>
           <a:xfrm>
-            <a:off x="640080" y="3017520"/>
-            <a:ext cx="1828800" cy="777240"/>
+            <a:off x="640080" y="4572000"/>
+            <a:ext cx="2743200" cy="274320"/>
           </a:xfrm>
           <a:prstGeom prst="rect">
             <a:avLst/>
@@ -6204,34 +6572,34 @@
           <a:noFill/>
         </p:spPr>
         <p:txBody>
-          <a:bodyPr wrap="square" lIns="0" tIns="0" rIns="0" bIns="0" anchor="ctr">
+          <a:bodyPr wrap="square" lIns="0" tIns="0" rIns="0" bIns="0" anchor="t">
             <a:spAutoFit/>
           </a:bodyPr>
           <a:lstStyle/>
           <a:p>
             <a:pPr algn="l"/>
             <a:r>
-              <a:rPr sz="1200" b="1">
-                <a:solidFill>
-                  <a:srgbClr val="556072"/>
-                </a:solidFill>
-                <a:latin typeface="Calibri"/>
-              </a:rPr>
-              <a:t>ESTABLISHED</a:t>
-            </a:r>
-          </a:p>
-        </p:txBody>
-      </p:sp>
-      <p:sp>
-        <p:nvSpPr>
-          <p:cNvPr id="9" name="TextBox 8"/>
+              <a:rPr sz="1100" b="1">
+                <a:solidFill>
+                  <a:srgbClr val="008E86"/>
+                </a:solidFill>
+                <a:latin typeface="Calibri"/>
+              </a:rPr>
+              <a:t>TECHNICAL STACK</a:t>
+            </a:r>
+          </a:p>
+        </p:txBody>
+      </p:sp>
+      <p:sp>
+        <p:nvSpPr>
+          <p:cNvPr id="16" name="TextBox 15"/>
           <p:cNvSpPr txBox="1"/>
           <p:nvPr/>
         </p:nvSpPr>
         <p:spPr>
           <a:xfrm>
-            <a:off x="2560320" y="3017520"/>
-            <a:ext cx="9006840" cy="777240"/>
+            <a:off x="640080" y="4937760"/>
+            <a:ext cx="5303520" cy="923330"/>
           </a:xfrm>
           <a:prstGeom prst="rect">
             <a:avLst/>
@@ -6239,33 +6607,196 @@
           <a:noFill/>
         </p:spPr>
         <p:txBody>
-          <a:bodyPr wrap="square" lIns="0" tIns="0" rIns="0" bIns="0" anchor="ctr">
+          <a:bodyPr wrap="square" lIns="0" tIns="0" rIns="0" bIns="0" anchor="t">
             <a:spAutoFit/>
           </a:bodyPr>
           <a:lstStyle/>
           <a:p>
             <a:pPr algn="l"/>
             <a:r>
-              <a:rPr sz="1400" b="0">
+              <a:rPr sz="1200" b="0" dirty="0">
                 <a:solidFill>
                   <a:srgbClr val="556072"/>
                 </a:solidFill>
                 <a:latin typeface="Calibri"/>
               </a:rPr>
-              <a:t>Retail investors face a documented financial-literacy gap.</a:t>
-            </a:r>
-          </a:p>
-        </p:txBody>
-      </p:sp>
-      <p:sp>
-        <p:nvSpPr>
-          <p:cNvPr id="10" name="Rectangle 9"/>
+              <a:t>Python </a:t>
+            </a:r>
+            <a:r>
+              <a:rPr lang="en-US" sz="1200" b="0" dirty="0">
+                <a:solidFill>
+                  <a:srgbClr val="556072"/>
+                </a:solidFill>
+                <a:latin typeface="Calibri"/>
+              </a:rPr>
+              <a:t>for </a:t>
+            </a:r>
+            <a:r>
+              <a:rPr sz="1200" b="0" dirty="0">
+                <a:solidFill>
+                  <a:srgbClr val="556072"/>
+                </a:solidFill>
+                <a:latin typeface="Calibri"/>
+              </a:rPr>
+              <a:t>Modal for ingestion and LLM orchestration.</a:t>
+            </a:r>
+          </a:p>
+          <a:p>
+            <a:pPr algn="l"/>
+            <a:r>
+              <a:rPr sz="1200" b="0" dirty="0" err="1">
+                <a:solidFill>
+                  <a:srgbClr val="556072"/>
+                </a:solidFill>
+                <a:latin typeface="Calibri"/>
+              </a:rPr>
+              <a:t>Supabase</a:t>
+            </a:r>
+            <a:r>
+              <a:rPr sz="1200" b="0" dirty="0">
+                <a:solidFill>
+                  <a:srgbClr val="556072"/>
+                </a:solidFill>
+                <a:latin typeface="Calibri"/>
+              </a:rPr>
+              <a:t> for storage and user accounts.</a:t>
+            </a:r>
+          </a:p>
+          <a:p>
+            <a:pPr algn="l"/>
+            <a:r>
+              <a:rPr sz="1200" b="0" dirty="0">
+                <a:solidFill>
+                  <a:srgbClr val="556072"/>
+                </a:solidFill>
+                <a:latin typeface="Calibri"/>
+              </a:rPr>
+              <a:t>React Native mobile app on iOS and Android.</a:t>
+            </a:r>
+          </a:p>
+          <a:p>
+            <a:pPr algn="l"/>
+            <a:r>
+              <a:rPr sz="1200" b="0" dirty="0">
+                <a:solidFill>
+                  <a:srgbClr val="556072"/>
+                </a:solidFill>
+                <a:latin typeface="Calibri"/>
+              </a:rPr>
+              <a:t>AI core: a large language model (Claude or GPT) handles all </a:t>
+            </a:r>
+            <a:r>
+              <a:rPr sz="1200" b="0" dirty="0" err="1">
+                <a:solidFill>
+                  <a:srgbClr val="556072"/>
+                </a:solidFill>
+                <a:latin typeface="Calibri"/>
+              </a:rPr>
+              <a:t>summarisation</a:t>
+            </a:r>
+            <a:r>
+              <a:rPr sz="1200" b="0" dirty="0">
+                <a:solidFill>
+                  <a:srgbClr val="556072"/>
+                </a:solidFill>
+                <a:latin typeface="Calibri"/>
+              </a:rPr>
+              <a:t>, explanation, and Q&amp;A.</a:t>
+            </a:r>
+          </a:p>
+        </p:txBody>
+      </p:sp>
+      <p:sp>
+        <p:nvSpPr>
+          <p:cNvPr id="17" name="TextBox 16"/>
+          <p:cNvSpPr txBox="1"/>
+          <p:nvPr/>
+        </p:nvSpPr>
+        <p:spPr>
+          <a:xfrm>
+            <a:off x="6263640" y="4572000"/>
+            <a:ext cx="2743200" cy="274320"/>
+          </a:xfrm>
+          <a:prstGeom prst="rect">
+            <a:avLst/>
+          </a:prstGeom>
+          <a:noFill/>
+        </p:spPr>
+        <p:txBody>
+          <a:bodyPr wrap="square" lIns="0" tIns="0" rIns="0" bIns="0" anchor="t">
+            <a:spAutoFit/>
+          </a:bodyPr>
+          <a:lstStyle/>
+          <a:p>
+            <a:pPr algn="l"/>
+            <a:r>
+              <a:rPr sz="1100" b="1">
+                <a:solidFill>
+                  <a:srgbClr val="008E86"/>
+                </a:solidFill>
+                <a:latin typeface="Calibri"/>
+              </a:rPr>
+              <a:t>EVALUATION</a:t>
+            </a:r>
+          </a:p>
+        </p:txBody>
+      </p:sp>
+      <p:sp>
+        <p:nvSpPr>
+          <p:cNvPr id="18" name="TextBox 17"/>
+          <p:cNvSpPr txBox="1"/>
+          <p:nvPr/>
+        </p:nvSpPr>
+        <p:spPr>
+          <a:xfrm>
+            <a:off x="6263640" y="4937760"/>
+            <a:ext cx="5303520" cy="369332"/>
+          </a:xfrm>
+          <a:prstGeom prst="rect">
+            <a:avLst/>
+          </a:prstGeom>
+          <a:noFill/>
+        </p:spPr>
+        <p:txBody>
+          <a:bodyPr wrap="square" lIns="0" tIns="0" rIns="0" bIns="0" anchor="t">
+            <a:spAutoFit/>
+          </a:bodyPr>
+          <a:lstStyle/>
+          <a:p>
+            <a:pPr algn="l"/>
+            <a:r>
+              <a:rPr sz="1200" b="0" dirty="0">
+                <a:solidFill>
+                  <a:srgbClr val="556072"/>
+                </a:solidFill>
+                <a:latin typeface="Calibri"/>
+              </a:rPr>
+              <a:t>Manual review of LLM outputs against source filings for accuracy.</a:t>
+            </a:r>
+          </a:p>
+          <a:p>
+            <a:pPr algn="l"/>
+            <a:r>
+              <a:rPr sz="1200" b="0" dirty="0">
+                <a:solidFill>
+                  <a:srgbClr val="556072"/>
+                </a:solidFill>
+                <a:latin typeface="Calibri"/>
+              </a:rPr>
+              <a:t>Small user study on whether the explanations actually aid understanding.</a:t>
+            </a:r>
+          </a:p>
+        </p:txBody>
+      </p:sp>
+      <p:sp>
+        <p:nvSpPr>
+          <p:cNvPr id="19" name="Rectangle 18"/>
           <p:cNvSpPr/>
           <p:nvPr/>
         </p:nvSpPr>
         <p:spPr>
           <a:xfrm>
-            <a:off x="640080" y="3860165"/>
+            <a:off x="640080" y="6446520"/>
             <a:ext cx="10927080" cy="6350"/>
           </a:xfrm>
           <a:prstGeom prst="rect">
@@ -6304,280 +6835,14 @@
       </p:sp>
       <p:sp>
         <p:nvSpPr>
-          <p:cNvPr id="11" name="TextBox 10"/>
+          <p:cNvPr id="20" name="TextBox 19"/>
           <p:cNvSpPr txBox="1"/>
           <p:nvPr/>
         </p:nvSpPr>
         <p:spPr>
           <a:xfrm>
-            <a:off x="640080" y="3931920"/>
-            <a:ext cx="1828800" cy="777240"/>
-          </a:xfrm>
-          <a:prstGeom prst="rect">
-            <a:avLst/>
-          </a:prstGeom>
-          <a:noFill/>
-        </p:spPr>
-        <p:txBody>
-          <a:bodyPr wrap="square" lIns="0" tIns="0" rIns="0" bIns="0" anchor="ctr">
-            <a:spAutoFit/>
-          </a:bodyPr>
-          <a:lstStyle/>
-          <a:p>
-            <a:pPr algn="l"/>
-            <a:r>
-              <a:rPr sz="1200" b="1">
-                <a:solidFill>
-                  <a:srgbClr val="556072"/>
-                </a:solidFill>
-                <a:latin typeface="Calibri"/>
-              </a:rPr>
-              <a:t>ESTABLISHED</a:t>
-            </a:r>
-          </a:p>
-        </p:txBody>
-      </p:sp>
-      <p:sp>
-        <p:nvSpPr>
-          <p:cNvPr id="12" name="TextBox 11"/>
-          <p:cNvSpPr txBox="1"/>
-          <p:nvPr/>
-        </p:nvSpPr>
-        <p:spPr>
-          <a:xfrm>
-            <a:off x="2560320" y="3931920"/>
-            <a:ext cx="9006840" cy="777240"/>
-          </a:xfrm>
-          <a:prstGeom prst="rect">
-            <a:avLst/>
-          </a:prstGeom>
-          <a:noFill/>
-        </p:spPr>
-        <p:txBody>
-          <a:bodyPr wrap="square" lIns="0" tIns="0" rIns="0" bIns="0" anchor="ctr">
-            <a:spAutoFit/>
-          </a:bodyPr>
-          <a:lstStyle/>
-          <a:p>
-            <a:pPr algn="l"/>
-            <a:r>
-              <a:rPr sz="1400" b="0">
-                <a:solidFill>
-                  <a:srgbClr val="556072"/>
-                </a:solidFill>
-                <a:latin typeface="Calibri"/>
-              </a:rPr>
-              <a:t>High-end synthesis tools exist for institutional users.</a:t>
-            </a:r>
-          </a:p>
-        </p:txBody>
-      </p:sp>
-      <p:sp>
-        <p:nvSpPr>
-          <p:cNvPr id="13" name="Rectangle 12"/>
-          <p:cNvSpPr/>
-          <p:nvPr/>
-        </p:nvSpPr>
-        <p:spPr>
-          <a:xfrm>
-            <a:off x="640080" y="4774565"/>
-            <a:ext cx="10927080" cy="6350"/>
-          </a:xfrm>
-          <a:prstGeom prst="rect">
-            <a:avLst/>
-          </a:prstGeom>
-          <a:solidFill>
-            <a:srgbClr val="E3E6EC"/>
-          </a:solidFill>
-          <a:ln>
-            <a:noFill/>
-          </a:ln>
-          <a:effectLst/>
-        </p:spPr>
-        <p:style>
-          <a:lnRef idx="1">
-            <a:schemeClr val="accent1"/>
-          </a:lnRef>
-          <a:fillRef idx="3">
-            <a:schemeClr val="accent1"/>
-          </a:fillRef>
-          <a:effectRef idx="2">
-            <a:schemeClr val="accent1"/>
-          </a:effectRef>
-          <a:fontRef idx="minor">
-            <a:schemeClr val="lt1"/>
-          </a:fontRef>
-        </p:style>
-        <p:txBody>
-          <a:bodyPr rtlCol="0" anchor="ctr"/>
-          <a:lstStyle/>
-          <a:p>
-            <a:pPr algn="ctr"/>
-            <a:endParaRPr/>
-          </a:p>
-        </p:txBody>
-      </p:sp>
-      <p:sp>
-        <p:nvSpPr>
-          <p:cNvPr id="14" name="TextBox 13"/>
-          <p:cNvSpPr txBox="1"/>
-          <p:nvPr/>
-        </p:nvSpPr>
-        <p:spPr>
-          <a:xfrm>
-            <a:off x="640080" y="4846320"/>
-            <a:ext cx="1828800" cy="777240"/>
-          </a:xfrm>
-          <a:prstGeom prst="rect">
-            <a:avLst/>
-          </a:prstGeom>
-          <a:noFill/>
-        </p:spPr>
-        <p:txBody>
-          <a:bodyPr wrap="square" lIns="0" tIns="0" rIns="0" bIns="0" anchor="ctr">
-            <a:spAutoFit/>
-          </a:bodyPr>
-          <a:lstStyle/>
-          <a:p>
-            <a:pPr algn="l"/>
-            <a:r>
-              <a:rPr sz="1200" b="1">
-                <a:solidFill>
-                  <a:srgbClr val="101A2E"/>
-                </a:solidFill>
-                <a:latin typeface="Calibri"/>
-              </a:rPr>
-              <a:t>OPEN</a:t>
-            </a:r>
-          </a:p>
-        </p:txBody>
-      </p:sp>
-      <p:sp>
-        <p:nvSpPr>
-          <p:cNvPr id="15" name="TextBox 14"/>
-          <p:cNvSpPr txBox="1"/>
-          <p:nvPr/>
-        </p:nvSpPr>
-        <p:spPr>
-          <a:xfrm>
-            <a:off x="2560320" y="5127218"/>
-            <a:ext cx="9006840" cy="215444"/>
-          </a:xfrm>
-          <a:prstGeom prst="rect">
-            <a:avLst/>
-          </a:prstGeom>
-          <a:noFill/>
-        </p:spPr>
-        <p:txBody>
-          <a:bodyPr wrap="square" lIns="0" tIns="0" rIns="0" bIns="0" anchor="ctr">
-            <a:spAutoFit/>
-          </a:bodyPr>
-          <a:lstStyle/>
-          <a:p>
-            <a:pPr algn="l"/>
-            <a:r>
-              <a:rPr sz="1400" b="1" dirty="0">
-                <a:solidFill>
-                  <a:srgbClr val="101A2E"/>
-                </a:solidFill>
-                <a:latin typeface="Calibri"/>
-              </a:rPr>
-              <a:t>A</a:t>
-            </a:r>
-            <a:r>
-              <a:rPr lang="en-US" sz="1400" b="1" dirty="0">
-                <a:solidFill>
-                  <a:srgbClr val="101A2E"/>
-                </a:solidFill>
-                <a:latin typeface="Calibri"/>
-              </a:rPr>
-              <a:t>n </a:t>
-            </a:r>
-            <a:r>
-              <a:rPr sz="1400" b="1" dirty="0">
-                <a:solidFill>
-                  <a:srgbClr val="101A2E"/>
-                </a:solidFill>
-                <a:latin typeface="Calibri"/>
-              </a:rPr>
-              <a:t>AI tool that explains earnings releases</a:t>
-            </a:r>
-            <a:r>
-              <a:rPr lang="en-US" sz="1400" b="1" dirty="0">
-                <a:solidFill>
-                  <a:srgbClr val="101A2E"/>
-                </a:solidFill>
-                <a:latin typeface="Calibri"/>
-              </a:rPr>
-              <a:t>/stock analyses</a:t>
-            </a:r>
-            <a:r>
-              <a:rPr sz="1400" b="1" dirty="0">
-                <a:solidFill>
-                  <a:srgbClr val="101A2E"/>
-                </a:solidFill>
-                <a:latin typeface="Calibri"/>
-              </a:rPr>
-              <a:t> in plain language to non-expert users</a:t>
-            </a:r>
-          </a:p>
-        </p:txBody>
-      </p:sp>
-      <p:sp>
-        <p:nvSpPr>
-          <p:cNvPr id="16" name="Rectangle 15"/>
-          <p:cNvSpPr/>
-          <p:nvPr/>
-        </p:nvSpPr>
-        <p:spPr>
-          <a:xfrm>
-            <a:off x="640080" y="6446520"/>
-            <a:ext cx="10927080" cy="6350"/>
-          </a:xfrm>
-          <a:prstGeom prst="rect">
-            <a:avLst/>
-          </a:prstGeom>
-          <a:solidFill>
-            <a:srgbClr val="E3E6EC"/>
-          </a:solidFill>
-          <a:ln>
-            <a:noFill/>
-          </a:ln>
-          <a:effectLst/>
-        </p:spPr>
-        <p:style>
-          <a:lnRef idx="1">
-            <a:schemeClr val="accent1"/>
-          </a:lnRef>
-          <a:fillRef idx="3">
-            <a:schemeClr val="accent1"/>
-          </a:fillRef>
-          <a:effectRef idx="2">
-            <a:schemeClr val="accent1"/>
-          </a:effectRef>
-          <a:fontRef idx="minor">
-            <a:schemeClr val="lt1"/>
-          </a:fontRef>
-        </p:style>
-        <p:txBody>
-          <a:bodyPr rtlCol="0" anchor="ctr"/>
-          <a:lstStyle/>
-          <a:p>
-            <a:pPr algn="ctr"/>
-            <a:endParaRPr/>
-          </a:p>
-        </p:txBody>
-      </p:sp>
-      <p:sp>
-        <p:nvSpPr>
-          <p:cNvPr id="17" name="TextBox 16"/>
-          <p:cNvSpPr txBox="1"/>
-          <p:nvPr/>
-        </p:nvSpPr>
-        <p:spPr>
-          <a:xfrm>
             <a:off x="640080" y="6537960"/>
-            <a:ext cx="7315200" cy="274320"/>
+            <a:ext cx="7315200" cy="153888"/>
           </a:xfrm>
           <a:prstGeom prst="rect">
             <a:avLst/>
@@ -6590,22 +6855,38 @@
           </a:bodyPr>
           <a:lstStyle/>
           <a:p>
-            <a:pPr algn="l"/>
-            <a:r>
-              <a:rPr sz="1000" b="0">
+            <a:r>
+              <a:rPr sz="1000" b="0" dirty="0">
                 <a:solidFill>
                   <a:srgbClr val="556072"/>
                 </a:solidFill>
                 <a:latin typeface="Calibri"/>
               </a:rPr>
-              <a:t>Sift  ·  CM3020 AI  ·  Template 4.2 — Financial Advisor Bot</a:t>
-            </a:r>
-          </a:p>
-        </p:txBody>
-      </p:sp>
-      <p:sp>
-        <p:nvSpPr>
-          <p:cNvPr id="18" name="TextBox 17"/>
+              <a:t>Sift  · </a:t>
+            </a:r>
+            <a:r>
+              <a:rPr lang="en-US" sz="1000" dirty="0">
+                <a:solidFill>
+                  <a:srgbClr val="556072"/>
+                </a:solidFill>
+              </a:rPr>
+              <a:t>CM3070 FYP</a:t>
+            </a:r>
+            <a:r>
+              <a:rPr sz="1000" b="0" dirty="0">
+                <a:solidFill>
+                  <a:srgbClr val="556072"/>
+                </a:solidFill>
+                <a:latin typeface="Calibri"/>
+              </a:rPr>
+              <a:t>  ·  Template 4.2 — Financial Advisor Bot</a:t>
+            </a:r>
+          </a:p>
+        </p:txBody>
+      </p:sp>
+      <p:sp>
+        <p:nvSpPr>
+          <p:cNvPr id="21" name="TextBox 20"/>
           <p:cNvSpPr txBox="1"/>
           <p:nvPr/>
         </p:nvSpPr>
@@ -6633,7 +6914,7 @@
                 </a:solidFill>
                 <a:latin typeface="Calibri"/>
               </a:rPr>
-              <a:t>5</a:t>
+              <a:t>6</a:t>
             </a:r>
           </a:p>
         </p:txBody>
@@ -6738,7 +7019,7 @@
                 </a:solidFill>
                 <a:latin typeface="Calibri"/>
               </a:rPr>
-              <a:t>APPROACH</a:t>
+              <a:t>DELIVERABLES</a:t>
             </a:r>
           </a:p>
         </p:txBody>
@@ -6773,7 +7054,7 @@
                 </a:solidFill>
                 <a:latin typeface="Calibri"/>
               </a:rPr>
-              <a:t>What gets built, and how.</a:t>
+              <a:t>What the submission will contain.</a:t>
             </a:r>
           </a:p>
         </p:txBody>
@@ -6786,8 +7067,8 @@
         </p:nvSpPr>
         <p:spPr>
           <a:xfrm>
-            <a:off x="640080" y="1965960"/>
-            <a:ext cx="1828800" cy="274320"/>
+            <a:off x="640080" y="2103120"/>
+            <a:ext cx="457200" cy="868680"/>
           </a:xfrm>
           <a:prstGeom prst="rect">
             <a:avLst/>
@@ -6795,20 +7076,20 @@
           <a:noFill/>
         </p:spPr>
         <p:txBody>
-          <a:bodyPr wrap="square" lIns="0" tIns="0" rIns="0" bIns="0" anchor="t">
+          <a:bodyPr wrap="square" lIns="0" tIns="0" rIns="0" bIns="0" anchor="ctr">
             <a:spAutoFit/>
           </a:bodyPr>
           <a:lstStyle/>
           <a:p>
             <a:pPr algn="l"/>
             <a:r>
-              <a:rPr sz="1100" b="1">
+              <a:rPr sz="2400" b="1">
                 <a:solidFill>
                   <a:srgbClr val="008E86"/>
                 </a:solidFill>
                 <a:latin typeface="Calibri"/>
               </a:rPr>
-              <a:t>COMPONENTS</a:t>
+              <a:t>·</a:t>
             </a:r>
           </a:p>
         </p:txBody>
@@ -6821,8 +7102,8 @@
         </p:nvSpPr>
         <p:spPr>
           <a:xfrm>
-            <a:off x="640080" y="2331720"/>
-            <a:ext cx="2697480" cy="411480"/>
+            <a:off x="1097280" y="2103120"/>
+            <a:ext cx="3657600" cy="868680"/>
           </a:xfrm>
           <a:prstGeom prst="rect">
             <a:avLst/>
@@ -6830,20 +7111,20 @@
           <a:noFill/>
         </p:spPr>
         <p:txBody>
-          <a:bodyPr wrap="square" lIns="0" tIns="0" rIns="0" bIns="0" anchor="t">
+          <a:bodyPr wrap="square" lIns="0" tIns="0" rIns="0" bIns="0" anchor="ctr">
             <a:spAutoFit/>
           </a:bodyPr>
           <a:lstStyle/>
           <a:p>
             <a:pPr algn="l"/>
             <a:r>
-              <a:rPr sz="1300" b="1">
+              <a:rPr sz="1800" b="1">
                 <a:solidFill>
                   <a:srgbClr val="101A2E"/>
                 </a:solidFill>
                 <a:latin typeface="Calibri"/>
               </a:rPr>
-              <a:t>Pre-earnings briefing</a:t>
+              <a:t>Working pipeline</a:t>
             </a:r>
           </a:p>
         </p:txBody>
@@ -6856,8 +7137,8 @@
         </p:nvSpPr>
         <p:spPr>
           <a:xfrm>
-            <a:off x="640080" y="2743200"/>
-            <a:ext cx="2697480" cy="1463040"/>
+            <a:off x="4937760" y="2103120"/>
+            <a:ext cx="6583680" cy="868680"/>
           </a:xfrm>
           <a:prstGeom prst="rect">
             <a:avLst/>
@@ -6865,261 +7146,33 @@
           <a:noFill/>
         </p:spPr>
         <p:txBody>
-          <a:bodyPr wrap="square" lIns="0" tIns="0" rIns="0" bIns="0" anchor="t">
+          <a:bodyPr wrap="square" lIns="0" tIns="0" rIns="0" bIns="0" anchor="ctr">
             <a:spAutoFit/>
           </a:bodyPr>
           <a:lstStyle/>
           <a:p>
             <a:pPr algn="l"/>
             <a:r>
-              <a:rPr sz="1100" b="0">
+              <a:rPr sz="1400" b="0">
                 <a:solidFill>
                   <a:srgbClr val="556072"/>
                 </a:solidFill>
                 <a:latin typeface="Calibri"/>
               </a:rPr>
-              <a:t>LLM writes a plain-English summary of what to expect from the upcoming release.</a:t>
-            </a:r>
-          </a:p>
-        </p:txBody>
-      </p:sp>
-      <p:sp>
-        <p:nvSpPr>
-          <p:cNvPr id="8" name="TextBox 7"/>
-          <p:cNvSpPr txBox="1"/>
-          <p:nvPr/>
-        </p:nvSpPr>
-        <p:spPr>
-          <a:xfrm>
-            <a:off x="3456432" y="2331720"/>
-            <a:ext cx="2697480" cy="411480"/>
-          </a:xfrm>
-          <a:prstGeom prst="rect">
-            <a:avLst/>
-          </a:prstGeom>
-          <a:noFill/>
-        </p:spPr>
-        <p:txBody>
-          <a:bodyPr wrap="square" lIns="0" tIns="0" rIns="0" bIns="0" anchor="t">
-            <a:spAutoFit/>
-          </a:bodyPr>
-          <a:lstStyle/>
-          <a:p>
-            <a:pPr algn="l"/>
-            <a:r>
-              <a:rPr sz="1300" b="1">
-                <a:solidFill>
-                  <a:srgbClr val="101A2E"/>
-                </a:solidFill>
-                <a:latin typeface="Calibri"/>
-              </a:rPr>
-              <a:t>Filing explainer</a:t>
-            </a:r>
-          </a:p>
-        </p:txBody>
-      </p:sp>
-      <p:sp>
-        <p:nvSpPr>
-          <p:cNvPr id="9" name="TextBox 8"/>
-          <p:cNvSpPr txBox="1"/>
-          <p:nvPr/>
-        </p:nvSpPr>
-        <p:spPr>
-          <a:xfrm>
-            <a:off x="3456432" y="2743200"/>
-            <a:ext cx="2697480" cy="1463040"/>
-          </a:xfrm>
-          <a:prstGeom prst="rect">
-            <a:avLst/>
-          </a:prstGeom>
-          <a:noFill/>
-        </p:spPr>
-        <p:txBody>
-          <a:bodyPr wrap="square" lIns="0" tIns="0" rIns="0" bIns="0" anchor="t">
-            <a:spAutoFit/>
-          </a:bodyPr>
-          <a:lstStyle/>
-          <a:p>
-            <a:pPr algn="l"/>
-            <a:r>
-              <a:rPr sz="1100" b="0">
-                <a:solidFill>
-                  <a:srgbClr val="556072"/>
-                </a:solidFill>
-                <a:latin typeface="Calibri"/>
-              </a:rPr>
-              <a:t>When an 8-K hits, the LLM produces a plain-English explanation of what was reported.</a:t>
-            </a:r>
-          </a:p>
-        </p:txBody>
-      </p:sp>
-      <p:sp>
-        <p:nvSpPr>
-          <p:cNvPr id="10" name="TextBox 9"/>
-          <p:cNvSpPr txBox="1"/>
-          <p:nvPr/>
-        </p:nvSpPr>
-        <p:spPr>
-          <a:xfrm>
-            <a:off x="6272784" y="2331720"/>
-            <a:ext cx="2697480" cy="411480"/>
-          </a:xfrm>
-          <a:prstGeom prst="rect">
-            <a:avLst/>
-          </a:prstGeom>
-          <a:noFill/>
-        </p:spPr>
-        <p:txBody>
-          <a:bodyPr wrap="square" lIns="0" tIns="0" rIns="0" bIns="0" anchor="t">
-            <a:spAutoFit/>
-          </a:bodyPr>
-          <a:lstStyle/>
-          <a:p>
-            <a:pPr algn="l"/>
-            <a:r>
-              <a:rPr sz="1300" b="1">
-                <a:solidFill>
-                  <a:srgbClr val="101A2E"/>
-                </a:solidFill>
-                <a:latin typeface="Calibri"/>
-              </a:rPr>
-              <a:t>Transcript breakdown</a:t>
-            </a:r>
-          </a:p>
-        </p:txBody>
-      </p:sp>
-      <p:sp>
-        <p:nvSpPr>
-          <p:cNvPr id="11" name="TextBox 10"/>
-          <p:cNvSpPr txBox="1"/>
-          <p:nvPr/>
-        </p:nvSpPr>
-        <p:spPr>
-          <a:xfrm>
-            <a:off x="6272784" y="2743200"/>
-            <a:ext cx="2697480" cy="1463040"/>
-          </a:xfrm>
-          <a:prstGeom prst="rect">
-            <a:avLst/>
-          </a:prstGeom>
-          <a:noFill/>
-        </p:spPr>
-        <p:txBody>
-          <a:bodyPr wrap="square" lIns="0" tIns="0" rIns="0" bIns="0" anchor="t">
-            <a:spAutoFit/>
-          </a:bodyPr>
-          <a:lstStyle/>
-          <a:p>
-            <a:pPr algn="l"/>
-            <a:r>
-              <a:rPr sz="1100" b="0" dirty="0">
-                <a:solidFill>
-                  <a:srgbClr val="556072"/>
-                </a:solidFill>
-                <a:latin typeface="Calibri"/>
-              </a:rPr>
-              <a:t>LLM </a:t>
-            </a:r>
-            <a:r>
-              <a:rPr sz="1100" b="0" dirty="0" err="1">
-                <a:solidFill>
-                  <a:srgbClr val="556072"/>
-                </a:solidFill>
-                <a:latin typeface="Calibri"/>
-              </a:rPr>
-              <a:t>summarises</a:t>
-            </a:r>
-            <a:r>
-              <a:rPr sz="1100" b="0" dirty="0">
-                <a:solidFill>
-                  <a:srgbClr val="556072"/>
-                </a:solidFill>
-                <a:latin typeface="Calibri"/>
-              </a:rPr>
-              <a:t> the earnings call — key points, tone, and any change in outlook.</a:t>
-            </a:r>
-          </a:p>
-        </p:txBody>
-      </p:sp>
-      <p:sp>
-        <p:nvSpPr>
-          <p:cNvPr id="12" name="TextBox 11"/>
-          <p:cNvSpPr txBox="1"/>
-          <p:nvPr/>
-        </p:nvSpPr>
-        <p:spPr>
-          <a:xfrm>
-            <a:off x="9089136" y="2331720"/>
-            <a:ext cx="2697480" cy="411480"/>
-          </a:xfrm>
-          <a:prstGeom prst="rect">
-            <a:avLst/>
-          </a:prstGeom>
-          <a:noFill/>
-        </p:spPr>
-        <p:txBody>
-          <a:bodyPr wrap="square" lIns="0" tIns="0" rIns="0" bIns="0" anchor="t">
-            <a:spAutoFit/>
-          </a:bodyPr>
-          <a:lstStyle/>
-          <a:p>
-            <a:pPr algn="l"/>
-            <a:r>
-              <a:rPr sz="1300" b="1">
-                <a:solidFill>
-                  <a:srgbClr val="101A2E"/>
-                </a:solidFill>
-                <a:latin typeface="Calibri"/>
-              </a:rPr>
-              <a:t>Ask Sift</a:t>
-            </a:r>
-          </a:p>
-        </p:txBody>
-      </p:sp>
-      <p:sp>
-        <p:nvSpPr>
-          <p:cNvPr id="13" name="TextBox 12"/>
-          <p:cNvSpPr txBox="1"/>
-          <p:nvPr/>
-        </p:nvSpPr>
-        <p:spPr>
-          <a:xfrm>
-            <a:off x="9089136" y="2743200"/>
-            <a:ext cx="2697480" cy="1463040"/>
-          </a:xfrm>
-          <a:prstGeom prst="rect">
-            <a:avLst/>
-          </a:prstGeom>
-          <a:noFill/>
-        </p:spPr>
-        <p:txBody>
-          <a:bodyPr wrap="square" lIns="0" tIns="0" rIns="0" bIns="0" anchor="t">
-            <a:spAutoFit/>
-          </a:bodyPr>
-          <a:lstStyle/>
-          <a:p>
-            <a:pPr algn="l"/>
-            <a:r>
-              <a:rPr sz="1100" b="0">
-                <a:solidFill>
-                  <a:srgbClr val="556072"/>
-                </a:solidFill>
-                <a:latin typeface="Calibri"/>
-              </a:rPr>
-              <a:t>User can ask follow-up questions about any term, figure, or section they don't understand.</a:t>
-            </a:r>
-          </a:p>
-        </p:txBody>
-      </p:sp>
-      <p:sp>
-        <p:nvSpPr>
-          <p:cNvPr id="14" name="Rectangle 13"/>
+              <a:t>End-to-end ingestion and LLM-based explanation, running on 50 selected tickers.</a:t>
+            </a:r>
+          </a:p>
+        </p:txBody>
+      </p:sp>
+      <p:sp>
+        <p:nvSpPr>
+          <p:cNvPr id="8" name="Rectangle 7"/>
           <p:cNvSpPr/>
           <p:nvPr/>
         </p:nvSpPr>
         <p:spPr>
           <a:xfrm>
-            <a:off x="640080" y="4389120"/>
+            <a:off x="640080" y="3037205"/>
             <a:ext cx="10927080" cy="6350"/>
           </a:xfrm>
           <a:prstGeom prst="rect">
@@ -7158,14 +7211,14 @@
       </p:sp>
       <p:sp>
         <p:nvSpPr>
-          <p:cNvPr id="15" name="TextBox 14"/>
+          <p:cNvPr id="9" name="TextBox 8"/>
           <p:cNvSpPr txBox="1"/>
           <p:nvPr/>
         </p:nvSpPr>
         <p:spPr>
           <a:xfrm>
-            <a:off x="640080" y="4572000"/>
-            <a:ext cx="2743200" cy="274320"/>
+            <a:off x="640080" y="3108960"/>
+            <a:ext cx="457200" cy="868680"/>
           </a:xfrm>
           <a:prstGeom prst="rect">
             <a:avLst/>
@@ -7173,34 +7226,34 @@
           <a:noFill/>
         </p:spPr>
         <p:txBody>
-          <a:bodyPr wrap="square" lIns="0" tIns="0" rIns="0" bIns="0" anchor="t">
+          <a:bodyPr wrap="square" lIns="0" tIns="0" rIns="0" bIns="0" anchor="ctr">
             <a:spAutoFit/>
           </a:bodyPr>
           <a:lstStyle/>
           <a:p>
             <a:pPr algn="l"/>
             <a:r>
-              <a:rPr sz="1100" b="1">
+              <a:rPr sz="2400" b="1">
                 <a:solidFill>
                   <a:srgbClr val="008E86"/>
                 </a:solidFill>
                 <a:latin typeface="Calibri"/>
               </a:rPr>
-              <a:t>TECHNICAL STACK</a:t>
-            </a:r>
-          </a:p>
-        </p:txBody>
-      </p:sp>
-      <p:sp>
-        <p:nvSpPr>
-          <p:cNvPr id="16" name="TextBox 15"/>
+              <a:t>·</a:t>
+            </a:r>
+          </a:p>
+        </p:txBody>
+      </p:sp>
+      <p:sp>
+        <p:nvSpPr>
+          <p:cNvPr id="10" name="TextBox 9"/>
           <p:cNvSpPr txBox="1"/>
           <p:nvPr/>
         </p:nvSpPr>
         <p:spPr>
           <a:xfrm>
-            <a:off x="640080" y="4937760"/>
-            <a:ext cx="5303520" cy="923330"/>
+            <a:off x="1097280" y="3108960"/>
+            <a:ext cx="3657600" cy="868680"/>
           </a:xfrm>
           <a:prstGeom prst="rect">
             <a:avLst/>
@@ -7208,97 +7261,34 @@
           <a:noFill/>
         </p:spPr>
         <p:txBody>
-          <a:bodyPr wrap="square" lIns="0" tIns="0" rIns="0" bIns="0" anchor="t">
+          <a:bodyPr wrap="square" lIns="0" tIns="0" rIns="0" bIns="0" anchor="ctr">
             <a:spAutoFit/>
           </a:bodyPr>
           <a:lstStyle/>
           <a:p>
             <a:pPr algn="l"/>
             <a:r>
-              <a:rPr sz="1200" b="0" dirty="0">
-                <a:solidFill>
-                  <a:srgbClr val="556072"/>
-                </a:solidFill>
-                <a:latin typeface="Calibri"/>
-              </a:rPr>
-              <a:t>Python workers on Modal for ingestion and LLM orchestration.</a:t>
-            </a:r>
-          </a:p>
-          <a:p>
-            <a:pPr algn="l"/>
-            <a:r>
-              <a:rPr sz="1200" b="0" dirty="0" err="1">
-                <a:solidFill>
-                  <a:srgbClr val="556072"/>
-                </a:solidFill>
-                <a:latin typeface="Calibri"/>
-              </a:rPr>
-              <a:t>Supabase</a:t>
-            </a:r>
-            <a:r>
-              <a:rPr sz="1200" b="0" dirty="0">
-                <a:solidFill>
-                  <a:srgbClr val="556072"/>
-                </a:solidFill>
-                <a:latin typeface="Calibri"/>
-              </a:rPr>
-              <a:t> for storage and user accounts.</a:t>
-            </a:r>
-          </a:p>
-          <a:p>
-            <a:pPr algn="l"/>
-            <a:r>
-              <a:rPr sz="1200" b="0" dirty="0">
-                <a:solidFill>
-                  <a:srgbClr val="556072"/>
-                </a:solidFill>
-                <a:latin typeface="Calibri"/>
-              </a:rPr>
-              <a:t>React Native mobile app on iOS and Android.</a:t>
-            </a:r>
-          </a:p>
-          <a:p>
-            <a:pPr algn="l"/>
-            <a:r>
-              <a:rPr sz="1200" b="0" dirty="0">
-                <a:solidFill>
-                  <a:srgbClr val="556072"/>
-                </a:solidFill>
-                <a:latin typeface="Calibri"/>
-              </a:rPr>
-              <a:t>AI core: a large language model (Claude or GPT) handles all </a:t>
-            </a:r>
-            <a:r>
-              <a:rPr sz="1200" b="0" dirty="0" err="1">
-                <a:solidFill>
-                  <a:srgbClr val="556072"/>
-                </a:solidFill>
-                <a:latin typeface="Calibri"/>
-              </a:rPr>
-              <a:t>summarisation</a:t>
-            </a:r>
-            <a:r>
-              <a:rPr sz="1200" b="0" dirty="0">
-                <a:solidFill>
-                  <a:srgbClr val="556072"/>
-                </a:solidFill>
-                <a:latin typeface="Calibri"/>
-              </a:rPr>
-              <a:t>, explanation, and Q&amp;A.</a:t>
-            </a:r>
-          </a:p>
-        </p:txBody>
-      </p:sp>
-      <p:sp>
-        <p:nvSpPr>
-          <p:cNvPr id="17" name="TextBox 16"/>
+              <a:rPr sz="1800" b="1">
+                <a:solidFill>
+                  <a:srgbClr val="101A2E"/>
+                </a:solidFill>
+                <a:latin typeface="Calibri"/>
+              </a:rPr>
+              <a:t>Evaluation report</a:t>
+            </a:r>
+          </a:p>
+        </p:txBody>
+      </p:sp>
+      <p:sp>
+        <p:nvSpPr>
+          <p:cNvPr id="11" name="TextBox 10"/>
           <p:cNvSpPr txBox="1"/>
           <p:nvPr/>
         </p:nvSpPr>
         <p:spPr>
           <a:xfrm>
-            <a:off x="6263640" y="4572000"/>
-            <a:ext cx="2743200" cy="274320"/>
+            <a:off x="4937760" y="3108960"/>
+            <a:ext cx="6583680" cy="868680"/>
           </a:xfrm>
           <a:prstGeom prst="rect">
             <a:avLst/>
@@ -7306,80 +7296,33 @@
           <a:noFill/>
         </p:spPr>
         <p:txBody>
-          <a:bodyPr wrap="square" lIns="0" tIns="0" rIns="0" bIns="0" anchor="t">
+          <a:bodyPr wrap="square" lIns="0" tIns="0" rIns="0" bIns="0" anchor="ctr">
             <a:spAutoFit/>
           </a:bodyPr>
           <a:lstStyle/>
           <a:p>
             <a:pPr algn="l"/>
             <a:r>
-              <a:rPr sz="1100" b="1">
-                <a:solidFill>
-                  <a:srgbClr val="008E86"/>
-                </a:solidFill>
-                <a:latin typeface="Calibri"/>
-              </a:rPr>
-              <a:t>EVALUATION</a:t>
-            </a:r>
-          </a:p>
-        </p:txBody>
-      </p:sp>
-      <p:sp>
-        <p:nvSpPr>
-          <p:cNvPr id="18" name="TextBox 17"/>
-          <p:cNvSpPr txBox="1"/>
-          <p:nvPr/>
-        </p:nvSpPr>
-        <p:spPr>
-          <a:xfrm>
-            <a:off x="6263640" y="4937760"/>
-            <a:ext cx="5303520" cy="369332"/>
-          </a:xfrm>
-          <a:prstGeom prst="rect">
-            <a:avLst/>
-          </a:prstGeom>
-          <a:noFill/>
-        </p:spPr>
-        <p:txBody>
-          <a:bodyPr wrap="square" lIns="0" tIns="0" rIns="0" bIns="0" anchor="t">
-            <a:spAutoFit/>
-          </a:bodyPr>
-          <a:lstStyle/>
-          <a:p>
-            <a:pPr algn="l"/>
-            <a:r>
-              <a:rPr sz="1200" b="0" dirty="0">
+              <a:rPr sz="1400" b="0">
                 <a:solidFill>
                   <a:srgbClr val="556072"/>
                 </a:solidFill>
                 <a:latin typeface="Calibri"/>
               </a:rPr>
-              <a:t>Manual review of LLM outputs against source filings for accuracy.</a:t>
-            </a:r>
-          </a:p>
-          <a:p>
-            <a:pPr algn="l"/>
-            <a:r>
-              <a:rPr sz="1200" b="0" dirty="0">
-                <a:solidFill>
-                  <a:srgbClr val="556072"/>
-                </a:solidFill>
-                <a:latin typeface="Calibri"/>
-              </a:rPr>
-              <a:t>Small user study on whether the explanations actually aid understanding.</a:t>
-            </a:r>
-          </a:p>
-        </p:txBody>
-      </p:sp>
-      <p:sp>
-        <p:nvSpPr>
-          <p:cNvPr id="19" name="Rectangle 18"/>
+              <a:t>Accuracy review against source filings, readability scoring, and user-study results.</a:t>
+            </a:r>
+          </a:p>
+        </p:txBody>
+      </p:sp>
+      <p:sp>
+        <p:nvSpPr>
+          <p:cNvPr id="12" name="Rectangle 11"/>
           <p:cNvSpPr/>
           <p:nvPr/>
         </p:nvSpPr>
         <p:spPr>
           <a:xfrm>
-            <a:off x="640080" y="6446520"/>
+            <a:off x="640080" y="4043045"/>
             <a:ext cx="10927080" cy="6350"/>
           </a:xfrm>
           <a:prstGeom prst="rect">
@@ -7418,14 +7361,14 @@
       </p:sp>
       <p:sp>
         <p:nvSpPr>
-          <p:cNvPr id="20" name="TextBox 19"/>
+          <p:cNvPr id="13" name="TextBox 12"/>
           <p:cNvSpPr txBox="1"/>
           <p:nvPr/>
         </p:nvSpPr>
         <p:spPr>
           <a:xfrm>
-            <a:off x="640080" y="6537960"/>
-            <a:ext cx="7315200" cy="274320"/>
+            <a:off x="640080" y="4114800"/>
+            <a:ext cx="457200" cy="868680"/>
           </a:xfrm>
           <a:prstGeom prst="rect">
             <a:avLst/>
@@ -7433,34 +7376,34 @@
           <a:noFill/>
         </p:spPr>
         <p:txBody>
-          <a:bodyPr wrap="square" lIns="0" tIns="0" rIns="0" bIns="0" anchor="t">
+          <a:bodyPr wrap="square" lIns="0" tIns="0" rIns="0" bIns="0" anchor="ctr">
             <a:spAutoFit/>
           </a:bodyPr>
           <a:lstStyle/>
           <a:p>
             <a:pPr algn="l"/>
             <a:r>
-              <a:rPr sz="1000" b="0">
-                <a:solidFill>
-                  <a:srgbClr val="556072"/>
-                </a:solidFill>
-                <a:latin typeface="Calibri"/>
-              </a:rPr>
-              <a:t>Sift  ·  CM3020 AI  ·  Template 4.2 — Financial Advisor Bot</a:t>
-            </a:r>
-          </a:p>
-        </p:txBody>
-      </p:sp>
-      <p:sp>
-        <p:nvSpPr>
-          <p:cNvPr id="21" name="TextBox 20"/>
+              <a:rPr sz="2400" b="1">
+                <a:solidFill>
+                  <a:srgbClr val="008E86"/>
+                </a:solidFill>
+                <a:latin typeface="Calibri"/>
+              </a:rPr>
+              <a:t>·</a:t>
+            </a:r>
+          </a:p>
+        </p:txBody>
+      </p:sp>
+      <p:sp>
+        <p:nvSpPr>
+          <p:cNvPr id="14" name="TextBox 13"/>
           <p:cNvSpPr txBox="1"/>
           <p:nvPr/>
         </p:nvSpPr>
         <p:spPr>
           <a:xfrm>
-            <a:off x="10607040" y="6537960"/>
-            <a:ext cx="914400" cy="274320"/>
+            <a:off x="1097280" y="4114800"/>
+            <a:ext cx="3657600" cy="868680"/>
           </a:xfrm>
           <a:prstGeom prst="rect">
             <a:avLst/>
@@ -7468,65 +7411,75 @@
           <a:noFill/>
         </p:spPr>
         <p:txBody>
-          <a:bodyPr wrap="square" lIns="0" tIns="0" rIns="0" bIns="0" anchor="t">
+          <a:bodyPr wrap="square" lIns="0" tIns="0" rIns="0" bIns="0" anchor="ctr">
             <a:spAutoFit/>
           </a:bodyPr>
           <a:lstStyle/>
           <a:p>
-            <a:pPr algn="r"/>
-            <a:r>
-              <a:rPr sz="1000" b="0">
+            <a:pPr algn="l"/>
+            <a:r>
+              <a:rPr sz="1800" b="1">
+                <a:solidFill>
+                  <a:srgbClr val="101A2E"/>
+                </a:solidFill>
+                <a:latin typeface="Calibri"/>
+              </a:rPr>
+              <a:t>Mobile application</a:t>
+            </a:r>
+          </a:p>
+        </p:txBody>
+      </p:sp>
+      <p:sp>
+        <p:nvSpPr>
+          <p:cNvPr id="15" name="TextBox 14"/>
+          <p:cNvSpPr txBox="1"/>
+          <p:nvPr/>
+        </p:nvSpPr>
+        <p:spPr>
+          <a:xfrm>
+            <a:off x="4937760" y="4114800"/>
+            <a:ext cx="6583680" cy="868680"/>
+          </a:xfrm>
+          <a:prstGeom prst="rect">
+            <a:avLst/>
+          </a:prstGeom>
+          <a:noFill/>
+        </p:spPr>
+        <p:txBody>
+          <a:bodyPr wrap="square" lIns="0" tIns="0" rIns="0" bIns="0" anchor="ctr">
+            <a:spAutoFit/>
+          </a:bodyPr>
+          <a:lstStyle/>
+          <a:p>
+            <a:pPr algn="l"/>
+            <a:r>
+              <a:rPr sz="1400" b="0">
                 <a:solidFill>
                   <a:srgbClr val="556072"/>
                 </a:solidFill>
                 <a:latin typeface="Calibri"/>
               </a:rPr>
-              <a:t>6</a:t>
-            </a:r>
-          </a:p>
-        </p:txBody>
-      </p:sp>
-    </p:spTree>
-  </p:cSld>
-  <p:clrMapOvr>
-    <a:masterClrMapping/>
-  </p:clrMapOvr>
-</p:sld>
-</file>
-
-<file path=ppt/slides/slide7.xml><?xml version="1.0" encoding="utf-8"?>
-<p:sld xmlns:a="http://schemas.openxmlformats.org/drawingml/2006/main" xmlns:r="http://schemas.openxmlformats.org/officeDocument/2006/relationships" xmlns:p="http://schemas.openxmlformats.org/presentationml/2006/main">
-  <p:cSld>
-    <p:spTree>
-      <p:nvGrpSpPr>
-        <p:cNvPr id="1" name=""/>
-        <p:cNvGrpSpPr/>
-        <p:nvPr/>
-      </p:nvGrpSpPr>
-      <p:grpSpPr>
-        <a:xfrm>
-          <a:off x="0" y="0"/>
-          <a:ext cx="0" cy="0"/>
-          <a:chOff x="0" y="0"/>
-          <a:chExt cx="0" cy="0"/>
-        </a:xfrm>
-      </p:grpSpPr>
-      <p:sp>
-        <p:nvSpPr>
-          <p:cNvPr id="2" name="Rectangle 1"/>
+              <a:t>A React Native app showing the explanations and Q&amp;A on iOS and Android.</a:t>
+            </a:r>
+          </a:p>
+        </p:txBody>
+      </p:sp>
+      <p:sp>
+        <p:nvSpPr>
+          <p:cNvPr id="16" name="Rectangle 15"/>
           <p:cNvSpPr/>
           <p:nvPr/>
         </p:nvSpPr>
         <p:spPr>
           <a:xfrm>
-            <a:off x="0" y="0"/>
-            <a:ext cx="12191695" cy="6858000"/>
+            <a:off x="640080" y="5048885"/>
+            <a:ext cx="10927080" cy="6350"/>
           </a:xfrm>
           <a:prstGeom prst="rect">
             <a:avLst/>
           </a:prstGeom>
           <a:solidFill>
-            <a:srgbClr val="FFFFFF"/>
+            <a:srgbClr val="E3E6EC"/>
           </a:solidFill>
           <a:ln>
             <a:noFill/>
@@ -7558,83 +7511,13 @@
       </p:sp>
       <p:sp>
         <p:nvSpPr>
-          <p:cNvPr id="3" name="TextBox 2"/>
+          <p:cNvPr id="17" name="TextBox 16"/>
           <p:cNvSpPr txBox="1"/>
           <p:nvPr/>
         </p:nvSpPr>
         <p:spPr>
           <a:xfrm>
-            <a:off x="640080" y="548640"/>
-            <a:ext cx="7315200" cy="274320"/>
-          </a:xfrm>
-          <a:prstGeom prst="rect">
-            <a:avLst/>
-          </a:prstGeom>
-          <a:noFill/>
-        </p:spPr>
-        <p:txBody>
-          <a:bodyPr wrap="square" lIns="0" tIns="0" rIns="0" bIns="0" anchor="t">
-            <a:spAutoFit/>
-          </a:bodyPr>
-          <a:lstStyle/>
-          <a:p>
-            <a:pPr algn="l"/>
-            <a:r>
-              <a:rPr sz="1100" b="1">
-                <a:solidFill>
-                  <a:srgbClr val="008E86"/>
-                </a:solidFill>
-                <a:latin typeface="Calibri"/>
-              </a:rPr>
-              <a:t>DELIVERABLES</a:t>
-            </a:r>
-          </a:p>
-        </p:txBody>
-      </p:sp>
-      <p:sp>
-        <p:nvSpPr>
-          <p:cNvPr id="4" name="TextBox 3"/>
-          <p:cNvSpPr txBox="1"/>
-          <p:nvPr/>
-        </p:nvSpPr>
-        <p:spPr>
-          <a:xfrm>
-            <a:off x="640080" y="868680"/>
-            <a:ext cx="10972800" cy="822960"/>
-          </a:xfrm>
-          <a:prstGeom prst="rect">
-            <a:avLst/>
-          </a:prstGeom>
-          <a:noFill/>
-        </p:spPr>
-        <p:txBody>
-          <a:bodyPr wrap="square" lIns="0" tIns="0" rIns="0" bIns="0" anchor="t">
-            <a:spAutoFit/>
-          </a:bodyPr>
-          <a:lstStyle/>
-          <a:p>
-            <a:pPr algn="l"/>
-            <a:r>
-              <a:rPr sz="3200" b="1">
-                <a:solidFill>
-                  <a:srgbClr val="101A2E"/>
-                </a:solidFill>
-                <a:latin typeface="Calibri"/>
-              </a:rPr>
-              <a:t>What the submission will contain.</a:t>
-            </a:r>
-          </a:p>
-        </p:txBody>
-      </p:sp>
-      <p:sp>
-        <p:nvSpPr>
-          <p:cNvPr id="5" name="TextBox 4"/>
-          <p:cNvSpPr txBox="1"/>
-          <p:nvPr/>
-        </p:nvSpPr>
-        <p:spPr>
-          <a:xfrm>
-            <a:off x="640080" y="2103120"/>
+            <a:off x="640080" y="5120640"/>
             <a:ext cx="457200" cy="868680"/>
           </a:xfrm>
           <a:prstGeom prst="rect">
@@ -7663,13 +7546,13 @@
       </p:sp>
       <p:sp>
         <p:nvSpPr>
-          <p:cNvPr id="6" name="TextBox 5"/>
+          <p:cNvPr id="18" name="TextBox 17"/>
           <p:cNvSpPr txBox="1"/>
           <p:nvPr/>
         </p:nvSpPr>
         <p:spPr>
           <a:xfrm>
-            <a:off x="1097280" y="2103120"/>
+            <a:off x="1097280" y="5120640"/>
             <a:ext cx="3657600" cy="868680"/>
           </a:xfrm>
           <a:prstGeom prst="rect">
@@ -7691,20 +7574,20 @@
                 </a:solidFill>
                 <a:latin typeface="Calibri"/>
               </a:rPr>
-              <a:t>Working pipeline</a:t>
-            </a:r>
-          </a:p>
-        </p:txBody>
-      </p:sp>
-      <p:sp>
-        <p:nvSpPr>
-          <p:cNvPr id="7" name="TextBox 6"/>
+              <a:t>Documentation</a:t>
+            </a:r>
+          </a:p>
+        </p:txBody>
+      </p:sp>
+      <p:sp>
+        <p:nvSpPr>
+          <p:cNvPr id="19" name="TextBox 18"/>
           <p:cNvSpPr txBox="1"/>
           <p:nvPr/>
         </p:nvSpPr>
         <p:spPr>
           <a:xfrm>
-            <a:off x="4937760" y="2103120"/>
+            <a:off x="4937760" y="5120640"/>
             <a:ext cx="6583680" cy="868680"/>
           </a:xfrm>
           <a:prstGeom prst="rect">
@@ -7726,492 +7609,7 @@
                 </a:solidFill>
                 <a:latin typeface="Calibri"/>
               </a:rPr>
-              <a:t>End-to-end ingestion and LLM-based explanation, running on 50 selected tickers.</a:t>
-            </a:r>
-          </a:p>
-        </p:txBody>
-      </p:sp>
-      <p:sp>
-        <p:nvSpPr>
-          <p:cNvPr id="8" name="Rectangle 7"/>
-          <p:cNvSpPr/>
-          <p:nvPr/>
-        </p:nvSpPr>
-        <p:spPr>
-          <a:xfrm>
-            <a:off x="640080" y="3037205"/>
-            <a:ext cx="10927080" cy="6350"/>
-          </a:xfrm>
-          <a:prstGeom prst="rect">
-            <a:avLst/>
-          </a:prstGeom>
-          <a:solidFill>
-            <a:srgbClr val="E3E6EC"/>
-          </a:solidFill>
-          <a:ln>
-            <a:noFill/>
-          </a:ln>
-          <a:effectLst/>
-        </p:spPr>
-        <p:style>
-          <a:lnRef idx="1">
-            <a:schemeClr val="accent1"/>
-          </a:lnRef>
-          <a:fillRef idx="3">
-            <a:schemeClr val="accent1"/>
-          </a:fillRef>
-          <a:effectRef idx="2">
-            <a:schemeClr val="accent1"/>
-          </a:effectRef>
-          <a:fontRef idx="minor">
-            <a:schemeClr val="lt1"/>
-          </a:fontRef>
-        </p:style>
-        <p:txBody>
-          <a:bodyPr rtlCol="0" anchor="ctr"/>
-          <a:lstStyle/>
-          <a:p>
-            <a:pPr algn="ctr"/>
-            <a:endParaRPr/>
-          </a:p>
-        </p:txBody>
-      </p:sp>
-      <p:sp>
-        <p:nvSpPr>
-          <p:cNvPr id="9" name="TextBox 8"/>
-          <p:cNvSpPr txBox="1"/>
-          <p:nvPr/>
-        </p:nvSpPr>
-        <p:spPr>
-          <a:xfrm>
-            <a:off x="640080" y="3108960"/>
-            <a:ext cx="457200" cy="868680"/>
-          </a:xfrm>
-          <a:prstGeom prst="rect">
-            <a:avLst/>
-          </a:prstGeom>
-          <a:noFill/>
-        </p:spPr>
-        <p:txBody>
-          <a:bodyPr wrap="square" lIns="0" tIns="0" rIns="0" bIns="0" anchor="ctr">
-            <a:spAutoFit/>
-          </a:bodyPr>
-          <a:lstStyle/>
-          <a:p>
-            <a:pPr algn="l"/>
-            <a:r>
-              <a:rPr sz="2400" b="1">
-                <a:solidFill>
-                  <a:srgbClr val="008E86"/>
-                </a:solidFill>
-                <a:latin typeface="Calibri"/>
-              </a:rPr>
-              <a:t>·</a:t>
-            </a:r>
-          </a:p>
-        </p:txBody>
-      </p:sp>
-      <p:sp>
-        <p:nvSpPr>
-          <p:cNvPr id="10" name="TextBox 9"/>
-          <p:cNvSpPr txBox="1"/>
-          <p:nvPr/>
-        </p:nvSpPr>
-        <p:spPr>
-          <a:xfrm>
-            <a:off x="1097280" y="3108960"/>
-            <a:ext cx="3657600" cy="868680"/>
-          </a:xfrm>
-          <a:prstGeom prst="rect">
-            <a:avLst/>
-          </a:prstGeom>
-          <a:noFill/>
-        </p:spPr>
-        <p:txBody>
-          <a:bodyPr wrap="square" lIns="0" tIns="0" rIns="0" bIns="0" anchor="ctr">
-            <a:spAutoFit/>
-          </a:bodyPr>
-          <a:lstStyle/>
-          <a:p>
-            <a:pPr algn="l"/>
-            <a:r>
-              <a:rPr sz="1800" b="1">
-                <a:solidFill>
-                  <a:srgbClr val="101A2E"/>
-                </a:solidFill>
-                <a:latin typeface="Calibri"/>
-              </a:rPr>
-              <a:t>Evaluation report</a:t>
-            </a:r>
-          </a:p>
-        </p:txBody>
-      </p:sp>
-      <p:sp>
-        <p:nvSpPr>
-          <p:cNvPr id="11" name="TextBox 10"/>
-          <p:cNvSpPr txBox="1"/>
-          <p:nvPr/>
-        </p:nvSpPr>
-        <p:spPr>
-          <a:xfrm>
-            <a:off x="4937760" y="3108960"/>
-            <a:ext cx="6583680" cy="868680"/>
-          </a:xfrm>
-          <a:prstGeom prst="rect">
-            <a:avLst/>
-          </a:prstGeom>
-          <a:noFill/>
-        </p:spPr>
-        <p:txBody>
-          <a:bodyPr wrap="square" lIns="0" tIns="0" rIns="0" bIns="0" anchor="ctr">
-            <a:spAutoFit/>
-          </a:bodyPr>
-          <a:lstStyle/>
-          <a:p>
-            <a:pPr algn="l"/>
-            <a:r>
-              <a:rPr sz="1400" b="0">
-                <a:solidFill>
-                  <a:srgbClr val="556072"/>
-                </a:solidFill>
-                <a:latin typeface="Calibri"/>
-              </a:rPr>
-              <a:t>Accuracy review against source filings, readability scoring, and user-study results.</a:t>
-            </a:r>
-          </a:p>
-        </p:txBody>
-      </p:sp>
-      <p:sp>
-        <p:nvSpPr>
-          <p:cNvPr id="12" name="Rectangle 11"/>
-          <p:cNvSpPr/>
-          <p:nvPr/>
-        </p:nvSpPr>
-        <p:spPr>
-          <a:xfrm>
-            <a:off x="640080" y="4043045"/>
-            <a:ext cx="10927080" cy="6350"/>
-          </a:xfrm>
-          <a:prstGeom prst="rect">
-            <a:avLst/>
-          </a:prstGeom>
-          <a:solidFill>
-            <a:srgbClr val="E3E6EC"/>
-          </a:solidFill>
-          <a:ln>
-            <a:noFill/>
-          </a:ln>
-          <a:effectLst/>
-        </p:spPr>
-        <p:style>
-          <a:lnRef idx="1">
-            <a:schemeClr val="accent1"/>
-          </a:lnRef>
-          <a:fillRef idx="3">
-            <a:schemeClr val="accent1"/>
-          </a:fillRef>
-          <a:effectRef idx="2">
-            <a:schemeClr val="accent1"/>
-          </a:effectRef>
-          <a:fontRef idx="minor">
-            <a:schemeClr val="lt1"/>
-          </a:fontRef>
-        </p:style>
-        <p:txBody>
-          <a:bodyPr rtlCol="0" anchor="ctr"/>
-          <a:lstStyle/>
-          <a:p>
-            <a:pPr algn="ctr"/>
-            <a:endParaRPr/>
-          </a:p>
-        </p:txBody>
-      </p:sp>
-      <p:sp>
-        <p:nvSpPr>
-          <p:cNvPr id="13" name="TextBox 12"/>
-          <p:cNvSpPr txBox="1"/>
-          <p:nvPr/>
-        </p:nvSpPr>
-        <p:spPr>
-          <a:xfrm>
-            <a:off x="640080" y="4114800"/>
-            <a:ext cx="457200" cy="868680"/>
-          </a:xfrm>
-          <a:prstGeom prst="rect">
-            <a:avLst/>
-          </a:prstGeom>
-          <a:noFill/>
-        </p:spPr>
-        <p:txBody>
-          <a:bodyPr wrap="square" lIns="0" tIns="0" rIns="0" bIns="0" anchor="ctr">
-            <a:spAutoFit/>
-          </a:bodyPr>
-          <a:lstStyle/>
-          <a:p>
-            <a:pPr algn="l"/>
-            <a:r>
-              <a:rPr sz="2400" b="1">
-                <a:solidFill>
-                  <a:srgbClr val="008E86"/>
-                </a:solidFill>
-                <a:latin typeface="Calibri"/>
-              </a:rPr>
-              <a:t>·</a:t>
-            </a:r>
-          </a:p>
-        </p:txBody>
-      </p:sp>
-      <p:sp>
-        <p:nvSpPr>
-          <p:cNvPr id="14" name="TextBox 13"/>
-          <p:cNvSpPr txBox="1"/>
-          <p:nvPr/>
-        </p:nvSpPr>
-        <p:spPr>
-          <a:xfrm>
-            <a:off x="1097280" y="4114800"/>
-            <a:ext cx="3657600" cy="868680"/>
-          </a:xfrm>
-          <a:prstGeom prst="rect">
-            <a:avLst/>
-          </a:prstGeom>
-          <a:noFill/>
-        </p:spPr>
-        <p:txBody>
-          <a:bodyPr wrap="square" lIns="0" tIns="0" rIns="0" bIns="0" anchor="ctr">
-            <a:spAutoFit/>
-          </a:bodyPr>
-          <a:lstStyle/>
-          <a:p>
-            <a:pPr algn="l"/>
-            <a:r>
-              <a:rPr sz="1800" b="1">
-                <a:solidFill>
-                  <a:srgbClr val="101A2E"/>
-                </a:solidFill>
-                <a:latin typeface="Calibri"/>
-              </a:rPr>
-              <a:t>Mobile application</a:t>
-            </a:r>
-          </a:p>
-        </p:txBody>
-      </p:sp>
-      <p:sp>
-        <p:nvSpPr>
-          <p:cNvPr id="15" name="TextBox 14"/>
-          <p:cNvSpPr txBox="1"/>
-          <p:nvPr/>
-        </p:nvSpPr>
-        <p:spPr>
-          <a:xfrm>
-            <a:off x="4937760" y="4114800"/>
-            <a:ext cx="6583680" cy="868680"/>
-          </a:xfrm>
-          <a:prstGeom prst="rect">
-            <a:avLst/>
-          </a:prstGeom>
-          <a:noFill/>
-        </p:spPr>
-        <p:txBody>
-          <a:bodyPr wrap="square" lIns="0" tIns="0" rIns="0" bIns="0" anchor="ctr">
-            <a:spAutoFit/>
-          </a:bodyPr>
-          <a:lstStyle/>
-          <a:p>
-            <a:pPr algn="l"/>
-            <a:r>
-              <a:rPr sz="1400" b="0">
-                <a:solidFill>
-                  <a:srgbClr val="556072"/>
-                </a:solidFill>
-                <a:latin typeface="Calibri"/>
-              </a:rPr>
-              <a:t>A React Native app showing the explanations and Q&amp;A on iOS and Android.</a:t>
-            </a:r>
-          </a:p>
-        </p:txBody>
-      </p:sp>
-      <p:sp>
-        <p:nvSpPr>
-          <p:cNvPr id="16" name="Rectangle 15"/>
-          <p:cNvSpPr/>
-          <p:nvPr/>
-        </p:nvSpPr>
-        <p:spPr>
-          <a:xfrm>
-            <a:off x="640080" y="5048885"/>
-            <a:ext cx="10927080" cy="6350"/>
-          </a:xfrm>
-          <a:prstGeom prst="rect">
-            <a:avLst/>
-          </a:prstGeom>
-          <a:solidFill>
-            <a:srgbClr val="E3E6EC"/>
-          </a:solidFill>
-          <a:ln>
-            <a:noFill/>
-          </a:ln>
-          <a:effectLst/>
-        </p:spPr>
-        <p:style>
-          <a:lnRef idx="1">
-            <a:schemeClr val="accent1"/>
-          </a:lnRef>
-          <a:fillRef idx="3">
-            <a:schemeClr val="accent1"/>
-          </a:fillRef>
-          <a:effectRef idx="2">
-            <a:schemeClr val="accent1"/>
-          </a:effectRef>
-          <a:fontRef idx="minor">
-            <a:schemeClr val="lt1"/>
-          </a:fontRef>
-        </p:style>
-        <p:txBody>
-          <a:bodyPr rtlCol="0" anchor="ctr"/>
-          <a:lstStyle/>
-          <a:p>
-            <a:pPr algn="ctr"/>
-            <a:endParaRPr/>
-          </a:p>
-        </p:txBody>
-      </p:sp>
-      <p:sp>
-        <p:nvSpPr>
-          <p:cNvPr id="17" name="TextBox 16"/>
-          <p:cNvSpPr txBox="1"/>
-          <p:nvPr/>
-        </p:nvSpPr>
-        <p:spPr>
-          <a:xfrm>
-            <a:off x="640080" y="5120640"/>
-            <a:ext cx="457200" cy="868680"/>
-          </a:xfrm>
-          <a:prstGeom prst="rect">
-            <a:avLst/>
-          </a:prstGeom>
-          <a:noFill/>
-        </p:spPr>
-        <p:txBody>
-          <a:bodyPr wrap="square" lIns="0" tIns="0" rIns="0" bIns="0" anchor="ctr">
-            <a:spAutoFit/>
-          </a:bodyPr>
-          <a:lstStyle/>
-          <a:p>
-            <a:pPr algn="l"/>
-            <a:r>
-              <a:rPr sz="2400" b="1">
-                <a:solidFill>
-                  <a:srgbClr val="008E86"/>
-                </a:solidFill>
-                <a:latin typeface="Calibri"/>
-              </a:rPr>
-              <a:t>·</a:t>
-            </a:r>
-          </a:p>
-        </p:txBody>
-      </p:sp>
-      <p:sp>
-        <p:nvSpPr>
-          <p:cNvPr id="18" name="TextBox 17"/>
-          <p:cNvSpPr txBox="1"/>
-          <p:nvPr/>
-        </p:nvSpPr>
-        <p:spPr>
-          <a:xfrm>
-            <a:off x="1097280" y="5120640"/>
-            <a:ext cx="3657600" cy="868680"/>
-          </a:xfrm>
-          <a:prstGeom prst="rect">
-            <a:avLst/>
-          </a:prstGeom>
-          <a:noFill/>
-        </p:spPr>
-        <p:txBody>
-          <a:bodyPr wrap="square" lIns="0" tIns="0" rIns="0" bIns="0" anchor="ctr">
-            <a:spAutoFit/>
-          </a:bodyPr>
-          <a:lstStyle/>
-          <a:p>
-            <a:pPr algn="l"/>
-            <a:r>
-              <a:rPr sz="1800" b="1">
-                <a:solidFill>
-                  <a:srgbClr val="101A2E"/>
-                </a:solidFill>
-                <a:latin typeface="Calibri"/>
-              </a:rPr>
-              <a:t>Documentation</a:t>
-            </a:r>
-          </a:p>
-        </p:txBody>
-      </p:sp>
-      <p:sp>
-        <p:nvSpPr>
-          <p:cNvPr id="19" name="TextBox 18"/>
-          <p:cNvSpPr txBox="1"/>
-          <p:nvPr/>
-        </p:nvSpPr>
-        <p:spPr>
-          <a:xfrm>
-            <a:off x="4937760" y="5120640"/>
-            <a:ext cx="6583680" cy="868680"/>
-          </a:xfrm>
-          <a:prstGeom prst="rect">
-            <a:avLst/>
-          </a:prstGeom>
-          <a:noFill/>
-        </p:spPr>
-        <p:txBody>
-          <a:bodyPr wrap="square" lIns="0" tIns="0" rIns="0" bIns="0" anchor="ctr">
-            <a:spAutoFit/>
-          </a:bodyPr>
-          <a:lstStyle/>
-          <a:p>
-            <a:pPr algn="l"/>
-            <a:r>
-              <a:rPr sz="1400" b="0">
-                <a:solidFill>
-                  <a:srgbClr val="556072"/>
-                </a:solidFill>
-                <a:latin typeface="Calibri"/>
-              </a:rPr>
               <a:t>Architecture notes, prompt design, data sources, and ethics positioning.</a:t>
-            </a:r>
-          </a:p>
-        </p:txBody>
-      </p:sp>
-      <p:sp>
-        <p:nvSpPr>
-          <p:cNvPr id="20" name="TextBox 19"/>
-          <p:cNvSpPr txBox="1"/>
-          <p:nvPr/>
-        </p:nvSpPr>
-        <p:spPr>
-          <a:xfrm>
-            <a:off x="640080" y="5852160"/>
-            <a:ext cx="10972800" cy="365760"/>
-          </a:xfrm>
-          <a:prstGeom prst="rect">
-            <a:avLst/>
-          </a:prstGeom>
-          <a:noFill/>
-        </p:spPr>
-        <p:txBody>
-          <a:bodyPr wrap="square" lIns="0" tIns="0" rIns="0" bIns="0" anchor="t">
-            <a:spAutoFit/>
-          </a:bodyPr>
-          <a:lstStyle/>
-          <a:p>
-            <a:pPr algn="l"/>
-            <a:r>
-              <a:rPr sz="1200" b="0">
-                <a:solidFill>
-                  <a:srgbClr val="556072"/>
-                </a:solidFill>
-                <a:latin typeface="Calibri"/>
-              </a:rPr>
-              <a:t>Framed as a research and education project — not financial advice.</a:t>
             </a:r>
           </a:p>
         </p:txBody>
